--- a/prezentacje/EN/ContentAI_Security_EN.pptx
+++ b/prezentacje/EN/ContentAI_Security_EN.pptx
@@ -2877,7 +2877,7 @@
                 <a:ea typeface="Arial" pitchFamily="34" charset="-122"/>
                 <a:cs typeface="Arial" pitchFamily="34" charset="-120"/>
               </a:rPr>
-              <a:t>No 2FA</a:t>
+              <a:t>2FA needs the gateway</a:t>
             </a:r>
             <a:endParaRPr lang="en-US" sz="1150" dirty="0"/>
           </a:p>
@@ -2916,7 +2916,7 @@
                 <a:ea typeface="Arial" pitchFamily="34" charset="-122"/>
                 <a:cs typeface="Arial" pitchFamily="34" charset="-120"/>
               </a:rPr>
-              <a:t>Login rests on a password. Recommendation: manager-generated passwords, 16 characters minimum.</a:t>
+              <a:t>Our own login is a password alone. The second factor comes from an authentication gateway placed in front.</a:t>
             </a:r>
             <a:endParaRPr lang="en-US" sz="950" dirty="0"/>
           </a:p>
@@ -2982,7 +2982,7 @@
                 <a:ea typeface="Arial" pitchFamily="34" charset="-122"/>
                 <a:cs typeface="Arial" pitchFamily="34" charset="-120"/>
               </a:rPr>
-              <a:t>Sessions in memory</a:t>
+              <a:t>No email reset</a:t>
             </a:r>
             <a:endParaRPr lang="en-US" sz="1150" dirty="0"/>
           </a:p>
@@ -3021,7 +3021,7 @@
                 <a:ea typeface="Arial" pitchFamily="34" charset="-122"/>
                 <a:cs typeface="Arial" pitchFamily="34" charset="-120"/>
               </a:rPr>
-              <a:t>Every service restart, updates included, signs everyone out.</a:t>
+              <a:t>An administrator changes passwords by command — there is no self-service.</a:t>
             </a:r>
             <a:endParaRPr lang="en-US" sz="950" dirty="0"/>
           </a:p>
@@ -3192,7 +3192,7 @@
                 <a:ea typeface="Arial" pitchFamily="34" charset="-122"/>
                 <a:cs typeface="Arial" pitchFamily="34" charset="-120"/>
               </a:rPr>
-              <a:t>No password reset</a:t>
+              <a:t>Trusts X-Forwarded-For</a:t>
             </a:r>
             <a:endParaRPr lang="en-US" sz="1150" dirty="0"/>
           </a:p>
@@ -3231,7 +3231,7 @@
                 <a:ea typeface="Arial" pitchFamily="34" charset="-122"/>
                 <a:cs typeface="Arial" pitchFamily="34" charset="-120"/>
               </a:rPr>
-              <a:t>An administrator changes passwords by command — there is no email self-service.</a:t>
+              <a:t>The server trusts this header, so it belongs behind your own Caddy only.</a:t>
             </a:r>
             <a:endParaRPr lang="en-US" sz="950" dirty="0"/>
           </a:p>
@@ -3297,7 +3297,7 @@
                 <a:ea typeface="Arial" pitchFamily="34" charset="-122"/>
                 <a:cs typeface="Arial" pitchFamily="34" charset="-120"/>
               </a:rPr>
-              <a:t>Trusts X-Forwarded-For</a:t>
+              <a:t>Port stays local</a:t>
             </a:r>
             <a:endParaRPr lang="en-US" sz="1150" dirty="0"/>
           </a:p>
@@ -3336,7 +3336,7 @@
                 <a:ea typeface="Arial" pitchFamily="34" charset="-122"/>
                 <a:cs typeface="Arial" pitchFamily="34" charset="-120"/>
               </a:rPr>
-              <a:t>The server trusts this header, so it belongs behind your own Caddy only.</a:t>
+              <a:t>With the gateway, port 3100 must not be exposed — the identity header would be forgeable.</a:t>
             </a:r>
             <a:endParaRPr lang="en-US" sz="950" dirty="0"/>
           </a:p>
@@ -7829,7 +7829,7 @@
                 <a:ea typeface="Cambria" pitchFamily="34" charset="-122"/>
                 <a:cs typeface="Cambria" pitchFamily="34" charset="-120"/>
               </a:rPr>
-              <a:t>HttpOnly cookie</a:t>
+              <a:t>Signed cookie</a:t>
             </a:r>
             <a:endParaRPr lang="en-US" sz="1500" dirty="0"/>
           </a:p>
@@ -7868,7 +7868,7 @@
                 <a:ea typeface="Arial" pitchFamily="34" charset="-122"/>
                 <a:cs typeface="Arial" pitchFamily="34" charset="-120"/>
               </a:rPr>
-              <a:t>The session token is unreachable from JavaScript, SameSite=Lax, Secure over HTTPS.</a:t>
+              <a:t>HMAC-SHA256 from the server secret. HttpOnly, SameSite=Lax, Secure over HTTPS. Tampering breaks the signature.</a:t>
             </a:r>
             <a:endParaRPr lang="en-US" sz="1000" dirty="0"/>
           </a:p>
@@ -7934,7 +7934,7 @@
                 <a:ea typeface="Arial" pitchFamily="34" charset="-122"/>
                 <a:cs typeface="Arial" pitchFamily="34" charset="-120"/>
               </a:rPr>
-              <a:t>Sessions live in process memory — restarting the service signs everyone out. A deliberate trade: zero dependencies, and signing back in costs a few seconds.</a:t>
+              <a:t>The session lives in a signed cookie rather than process memory, so restarting the service does not sign the team out. Four revocation paths work without a restart: deleting the account, changing the password, changing the role, and signing out.</a:t>
             </a:r>
             <a:endParaRPr lang="en-US" sz="1050" dirty="0"/>
           </a:p>

--- a/prezentacje/EN/ContentAI_Security_EN.pptx
+++ b/prezentacje/EN/ContentAI_Security_EN.pptx
@@ -3021,7 +3021,7 @@
                 <a:ea typeface="Arial" pitchFamily="34" charset="-122"/>
                 <a:cs typeface="Arial" pitchFamily="34" charset="-120"/>
               </a:rPr>
-              <a:t>An administrator changes passwords by command — there is no self-service.</a:t>
+              <a:t>An administrator changes passwords by command - there is no self-service.</a:t>
             </a:r>
             <a:endParaRPr lang="en-US" sz="950" dirty="0"/>
           </a:p>
@@ -3336,7 +3336,7 @@
                 <a:ea typeface="Arial" pitchFamily="34" charset="-122"/>
                 <a:cs typeface="Arial" pitchFamily="34" charset="-120"/>
               </a:rPr>
-              <a:t>With the gateway, port 3100 must not be exposed — the identity header would be forgeable.</a:t>
+              <a:t>With the gateway, port 3100 must not be exposed - the identity header would be forgeable.</a:t>
             </a:r>
             <a:endParaRPr lang="en-US" sz="950" dirty="0"/>
           </a:p>
@@ -4361,7 +4361,7 @@
                 <a:ea typeface="Arial" pitchFamily="34" charset="-122"/>
                 <a:cs typeface="Arial" pitchFamily="34" charset="-120"/>
               </a:rPr>
-              <a:t>serwer/dane/ holds accounts and the knowledge base — the only data git cannot restore.</a:t>
+              <a:t>serwer/dane/ holds accounts and the knowledge base - the only data git cannot restore.</a:t>
             </a:r>
             <a:endParaRPr lang="en-US" sz="950" dirty="0"/>
           </a:p>
@@ -5208,7 +5208,7 @@
                 <a:ea typeface="Arial" pitchFamily="34" charset="-122"/>
                 <a:cs typeface="Arial" pitchFamily="34" charset="-120"/>
               </a:rPr>
-              <a:t>a browser fingerprint — gone once site data is cleared</a:t>
+              <a:t>a browser fingerprint - gone once site data is cleared</a:t>
             </a:r>
             <a:endParaRPr lang="en-US" sz="950" dirty="0"/>
           </a:p>
@@ -6614,7 +6614,7 @@
                 <a:ea typeface="Arial" pitchFamily="34" charset="-122"/>
                 <a:cs typeface="Arial" pitchFamily="34" charset="-120"/>
               </a:rPr>
-              <a:t>The server runs on your machine — a systemd unit with restricted privileges, writing only to the accounts directory</a:t>
+              <a:t>The server runs on your machine - a systemd unit with restricted privileges, writing only to the accounts directory</a:t>
             </a:r>
             <a:endParaRPr lang="en-US" sz="1100" dirty="0"/>
           </a:p>
@@ -8371,7 +8371,7 @@
                 <a:ea typeface="Arial" pitchFamily="34" charset="-122"/>
                 <a:cs typeface="Arial" pitchFamily="34" charset="-120"/>
               </a:rPr>
-              <a:t>nothing — the app calls your server, which attaches the key</a:t>
+              <a:t>nothing - the app calls your server, which attaches the key</a:t>
             </a:r>
             <a:endParaRPr lang="en-US" sz="1050" dirty="0"/>
           </a:p>
@@ -8581,7 +8581,7 @@
                 <a:ea typeface="Arial" pitchFamily="34" charset="-122"/>
                 <a:cs typeface="Arial" pitchFamily="34" charset="-120"/>
               </a:rPr>
-              <a:t>an admin endpoint reports whether a key is set — never its value</a:t>
+              <a:t>an admin endpoint reports whether a key is set - never its value</a:t>
             </a:r>
             <a:endParaRPr lang="en-US" sz="1050" dirty="0"/>
           </a:p>
@@ -9318,7 +9318,7 @@
                 <a:ea typeface="Arial" pitchFamily="34" charset="-122"/>
                 <a:cs typeface="Arial" pitchFamily="34" charset="-120"/>
               </a:rPr>
-              <a:t>Only passages matching the topic reach the prompt, not the whole base — less data leaves the organisation than when whole documents were pasted in.</a:t>
+              <a:t>Only passages matching the topic reach the prompt, not the whole base - less data leaves the organisation than when whole documents were pasted in.</a:t>
             </a:r>
             <a:endParaRPr lang="en-US" sz="1050" dirty="0"/>
           </a:p>
@@ -9835,7 +9835,7 @@
                 <a:ea typeface="Arial" pitchFamily="34" charset="-122"/>
                 <a:cs typeface="Arial" pitchFamily="34" charset="-120"/>
               </a:rPr>
-              <a:t>The filename derives from the login passed through a character filter — directory traversal is not possible</a:t>
+              <a:t>The filename derives from the login passed through a character filter - directory traversal is not possible</a:t>
             </a:r>
             <a:endParaRPr lang="en-US" sz="1100" dirty="0"/>
           </a:p>
@@ -10207,7 +10207,7 @@
                 <a:ea typeface="Arial" pitchFamily="34" charset="-122"/>
                 <a:cs typeface="Arial" pitchFamily="34" charset="-120"/>
               </a:rPr>
-              <a:t>the containerised OpenSEO starts with no login at all — exposed directly it grants full access to anyone who knows the address</a:t>
+              <a:t>the containerised OpenSEO starts with no login at all - exposed directly it grants full access to anyone who knows the address</a:t>
             </a:r>
             <a:endParaRPr lang="en-US" sz="1050" dirty="0"/>
           </a:p>
